--- a/klasse-6/01-arithmetik-algebra/wiederholung.pptx
+++ b/klasse-6/01-arithmetik-algebra/wiederholung.pptx
@@ -464,746 +464,707 @@
 </file>
 
 <file path=ppt/notesSlides/notesSlide1.xml><?xml version="1.0" encoding="utf-8"?>
-<p:notes xmlns:a="http://schemas.openxmlformats.org/drawingml/2006/main" xmlns:r="http://schemas.openxmlformats.org/officeDocument/2006/relationships" xmlns:p="http://schemas.openxmlformats.org/presentationml/2006/main">
-  <p:cSld>
-    <p:spTree>
-      <p:nvGrpSpPr>
-        <p:cNvPr id="1" name=""/>
-        <p:cNvGrpSpPr/>
-        <p:nvPr/>
-      </p:nvGrpSpPr>
-      <p:grpSpPr>
+<ns0:notes xmlns:a="http://schemas.openxmlformats.org/drawingml/2006/main" xmlns:ns0="http://schemas.openxmlformats.org/presentationml/2006/main" xmlns:ns2="http://schemas.microsoft.com/office/powerpoint/2010/main">
+  <ns0:cSld>
+    <ns0:spTree>
+      <ns0:nvGrpSpPr>
+        <ns0:cNvPr id="1" name=""/>
+        <ns0:cNvGrpSpPr/>
+        <ns0:nvPr/>
+      </ns0:nvGrpSpPr>
+      <ns0:grpSpPr>
         <a:xfrm>
           <a:off x="0" y="0"/>
           <a:ext cx="0" cy="0"/>
           <a:chOff x="0" y="0"/>
           <a:chExt cx="0" cy="0"/>
         </a:xfrm>
-      </p:grpSpPr>
-      <p:sp>
-        <p:nvSpPr>
-          <p:cNvPr id="2" name="Slide Image Placeholder 1"/>
-          <p:cNvSpPr>
+      </ns0:grpSpPr>
+      <ns0:sp>
+        <ns0:nvSpPr>
+          <ns0:cNvPr id="2" name="Slide Image Placeholder 1"/>
+          <ns0:cNvSpPr>
             <a:spLocks noGrp="1" noRot="1" noChangeAspect="1"/>
-          </p:cNvSpPr>
-          <p:nvPr>
-            <p:ph type="sldImg"/>
-          </p:nvPr>
-        </p:nvSpPr>
-        <p:spPr/>
-      </p:sp>
-      <p:sp>
-        <p:nvSpPr>
-          <p:cNvPr id="3" name="Notes Placeholder 2"/>
-          <p:cNvSpPr>
+          </ns0:cNvSpPr>
+          <ns0:nvPr>
+            <ns0:ph type="sldImg"/>
+          </ns0:nvPr>
+        </ns0:nvSpPr>
+        <ns0:spPr/>
+      </ns0:sp>
+      <ns0:sp>
+        <ns0:nvSpPr>
+          <ns0:cNvPr id="3" name="Notes Placeholder 2"/>
+          <ns0:cNvSpPr>
             <a:spLocks noGrp="1"/>
-          </p:cNvSpPr>
-          <p:nvPr>
-            <p:ph type="body" idx="1"/>
-          </p:nvPr>
-        </p:nvSpPr>
-        <p:spPr/>
-        <p:txBody>
+          </ns0:cNvSpPr>
+          <ns0:nvPr>
+            <ns0:ph type="body" idx="1"/>
+          </ns0:nvPr>
+        </ns0:nvSpPr>
+        <ns0:spPr/>
+        <ns0:txBody>
           <a:bodyPr/>
           <a:lstStyle/>
           <a:p>
             <a:r>
               <a:rPr lang="en-US" dirty="0"/>
-              <a:t>Themengebiet: Arithmetik/Algebra
-Stufe: Klasse 6
-Die Präsentation ist als kurze Wiederholung vor bzw. zu Beginn einer Unterrichtsphase gedacht.</a:t>
+              <a:t/>
             </a:r>
             <a:endParaRPr lang="en-US" dirty="0"/>
           </a:p>
-        </p:txBody>
-      </p:sp>
-      <p:sp>
-        <p:nvSpPr>
-          <p:cNvPr id="4" name="Slide Number Placeholder 3"/>
-          <p:cNvSpPr>
+        </ns0:txBody>
+      </ns0:sp>
+      <ns0:sp>
+        <ns0:nvSpPr>
+          <ns0:cNvPr id="4" name="Slide Number Placeholder 3"/>
+          <ns0:cNvSpPr>
             <a:spLocks noGrp="1"/>
-          </p:cNvSpPr>
-          <p:nvPr>
-            <p:ph type="sldNum" sz="quarter" idx="10"/>
-          </p:nvPr>
-        </p:nvSpPr>
-        <p:spPr/>
-        <p:txBody>
+          </ns0:cNvSpPr>
+          <ns0:nvPr>
+            <ns0:ph type="sldNum" sz="quarter" idx="10"/>
+          </ns0:nvPr>
+        </ns0:nvSpPr>
+        <ns0:spPr/>
+        <ns0:txBody>
           <a:bodyPr/>
           <a:lstStyle/>
           <a:p>
             <a:fld id="{F7021451-1387-4CA6-816F-3879F97B5CBC}" type="slidenum">
               <a:rPr lang="en-US"/>
-              <a:t>1</a:t>
+              <a:t/>
             </a:fld>
             <a:endParaRPr lang="en-US"/>
           </a:p>
-        </p:txBody>
-      </p:sp>
-    </p:spTree>
-    <p:extLst>
-      <p:ext uri="{BB962C8B-B14F-4D97-AF65-F5344CB8AC3E}">
-        <p14:creationId xmlns:p14="http://schemas.microsoft.com/office/powerpoint/2010/main" val="1024086991"/>
-      </p:ext>
-    </p:extLst>
-  </p:cSld>
-  <p:clrMapOvr>
+        </ns0:txBody>
+      </ns0:sp>
+    </ns0:spTree>
+    <ns0:extLst>
+      <ns0:ext uri="{BB962C8B-B14F-4D97-AF65-F5344CB8AC3E}">
+        <ns2:creationId val="1024086991"/>
+      </ns0:ext>
+    </ns0:extLst>
+  </ns0:cSld>
+  <ns0:clrMapOvr>
     <a:masterClrMapping/>
-  </p:clrMapOvr>
-</p:notes>
+  </ns0:clrMapOvr>
+</ns0:notes>
 </file>
 
 <file path=ppt/notesSlides/notesSlide2.xml><?xml version="1.0" encoding="utf-8"?>
-<p:notes xmlns:a="http://schemas.openxmlformats.org/drawingml/2006/main" xmlns:r="http://schemas.openxmlformats.org/officeDocument/2006/relationships" xmlns:p="http://schemas.openxmlformats.org/presentationml/2006/main">
-  <p:cSld>
-    <p:spTree>
-      <p:nvGrpSpPr>
-        <p:cNvPr id="1" name=""/>
-        <p:cNvGrpSpPr/>
-        <p:nvPr/>
-      </p:nvGrpSpPr>
-      <p:grpSpPr>
+<ns0:notes xmlns:a="http://schemas.openxmlformats.org/drawingml/2006/main" xmlns:ns0="http://schemas.openxmlformats.org/presentationml/2006/main" xmlns:ns2="http://schemas.microsoft.com/office/powerpoint/2010/main">
+  <ns0:cSld>
+    <ns0:spTree>
+      <ns0:nvGrpSpPr>
+        <ns0:cNvPr id="1" name=""/>
+        <ns0:cNvGrpSpPr/>
+        <ns0:nvPr/>
+      </ns0:nvGrpSpPr>
+      <ns0:grpSpPr>
         <a:xfrm>
           <a:off x="0" y="0"/>
           <a:ext cx="0" cy="0"/>
           <a:chOff x="0" y="0"/>
           <a:chExt cx="0" cy="0"/>
         </a:xfrm>
-      </p:grpSpPr>
-      <p:sp>
-        <p:nvSpPr>
-          <p:cNvPr id="2" name="Slide Image Placeholder 1"/>
-          <p:cNvSpPr>
+      </ns0:grpSpPr>
+      <ns0:sp>
+        <ns0:nvSpPr>
+          <ns0:cNvPr id="2" name="Slide Image Placeholder 1"/>
+          <ns0:cNvSpPr>
             <a:spLocks noGrp="1" noRot="1" noChangeAspect="1"/>
-          </p:cNvSpPr>
-          <p:nvPr>
-            <p:ph type="sldImg"/>
-          </p:nvPr>
-        </p:nvSpPr>
-        <p:spPr/>
-      </p:sp>
-      <p:sp>
-        <p:nvSpPr>
-          <p:cNvPr id="3" name="Notes Placeholder 2"/>
-          <p:cNvSpPr>
+          </ns0:cNvSpPr>
+          <ns0:nvPr>
+            <ns0:ph type="sldImg"/>
+          </ns0:nvPr>
+        </ns0:nvSpPr>
+        <ns0:spPr/>
+      </ns0:sp>
+      <ns0:sp>
+        <ns0:nvSpPr>
+          <ns0:cNvPr id="3" name="Notes Placeholder 2"/>
+          <ns0:cNvSpPr>
             <a:spLocks noGrp="1"/>
-          </p:cNvSpPr>
-          <p:nvPr>
-            <p:ph type="body" idx="1"/>
-          </p:nvPr>
-        </p:nvSpPr>
-        <p:spPr/>
-        <p:txBody>
+          </ns0:cNvSpPr>
+          <ns0:nvPr>
+            <ns0:ph type="body" idx="1"/>
+          </ns0:nvPr>
+        </ns0:nvSpPr>
+        <ns0:spPr/>
+        <ns0:txBody>
           <a:bodyPr/>
           <a:lstStyle/>
           <a:p>
             <a:r>
               <a:rPr lang="en-US" dirty="0"/>
-              <a:t>1. Ist 126 durch 3 teilbar? Begründe kurz.
-Lösung: Ja, Quersumme 1+2+6=9 ist durch 3 teilbar.
-2. Schreibe 0,75 als Bruch und Prozentzahl.
-Lösung: 3/4 und 75 %.
-3. Berechne: 1/4 + 2/4.
-Lösung: 3/4.
-4. Ordne: −4, 2, −1, 0.
-Lösung: −4 &lt; −1 &lt; 0 &lt; 2.</a:t>
+              <a:t/>
             </a:r>
             <a:endParaRPr lang="en-US" dirty="0"/>
           </a:p>
-        </p:txBody>
-      </p:sp>
-      <p:sp>
-        <p:nvSpPr>
-          <p:cNvPr id="4" name="Slide Number Placeholder 3"/>
-          <p:cNvSpPr>
+        </ns0:txBody>
+      </ns0:sp>
+      <ns0:sp>
+        <ns0:nvSpPr>
+          <ns0:cNvPr id="4" name="Slide Number Placeholder 3"/>
+          <ns0:cNvSpPr>
             <a:spLocks noGrp="1"/>
-          </p:cNvSpPr>
-          <p:nvPr>
-            <p:ph type="sldNum" sz="quarter" idx="10"/>
-          </p:nvPr>
-        </p:nvSpPr>
-        <p:spPr/>
-        <p:txBody>
+          </ns0:cNvSpPr>
+          <ns0:nvPr>
+            <ns0:ph type="sldNum" sz="quarter" idx="10"/>
+          </ns0:nvPr>
+        </ns0:nvSpPr>
+        <ns0:spPr/>
+        <ns0:txBody>
           <a:bodyPr/>
           <a:lstStyle/>
           <a:p>
             <a:fld id="{F7021451-1387-4CA6-816F-3879F97B5CBC}" type="slidenum">
               <a:rPr lang="en-US"/>
-              <a:t>2</a:t>
+              <a:t/>
             </a:fld>
             <a:endParaRPr lang="en-US"/>
           </a:p>
-        </p:txBody>
-      </p:sp>
-    </p:spTree>
-    <p:extLst>
-      <p:ext uri="{BB962C8B-B14F-4D97-AF65-F5344CB8AC3E}">
-        <p14:creationId xmlns:p14="http://schemas.microsoft.com/office/powerpoint/2010/main" val="1024086991"/>
-      </p:ext>
-    </p:extLst>
-  </p:cSld>
-  <p:clrMapOvr>
+        </ns0:txBody>
+      </ns0:sp>
+    </ns0:spTree>
+    <ns0:extLst>
+      <ns0:ext uri="{BB962C8B-B14F-4D97-AF65-F5344CB8AC3E}">
+        <ns2:creationId val="1024086991"/>
+      </ns0:ext>
+    </ns0:extLst>
+  </ns0:cSld>
+  <ns0:clrMapOvr>
     <a:masterClrMapping/>
-  </p:clrMapOvr>
-</p:notes>
+  </ns0:clrMapOvr>
+</ns0:notes>
 </file>
 
 <file path=ppt/notesSlides/notesSlide3.xml><?xml version="1.0" encoding="utf-8"?>
-<p:notes xmlns:a="http://schemas.openxmlformats.org/drawingml/2006/main" xmlns:r="http://schemas.openxmlformats.org/officeDocument/2006/relationships" xmlns:p="http://schemas.openxmlformats.org/presentationml/2006/main">
-  <p:cSld>
-    <p:spTree>
-      <p:nvGrpSpPr>
-        <p:cNvPr id="1" name=""/>
-        <p:cNvGrpSpPr/>
-        <p:nvPr/>
-      </p:nvGrpSpPr>
-      <p:grpSpPr>
+<ns0:notes xmlns:a="http://schemas.openxmlformats.org/drawingml/2006/main" xmlns:ns0="http://schemas.openxmlformats.org/presentationml/2006/main" xmlns:ns2="http://schemas.microsoft.com/office/powerpoint/2010/main">
+  <ns0:cSld>
+    <ns0:spTree>
+      <ns0:nvGrpSpPr>
+        <ns0:cNvPr id="1" name=""/>
+        <ns0:cNvGrpSpPr/>
+        <ns0:nvPr/>
+      </ns0:nvGrpSpPr>
+      <ns0:grpSpPr>
         <a:xfrm>
           <a:off x="0" y="0"/>
           <a:ext cx="0" cy="0"/>
           <a:chOff x="0" y="0"/>
           <a:chExt cx="0" cy="0"/>
         </a:xfrm>
-      </p:grpSpPr>
-      <p:sp>
-        <p:nvSpPr>
-          <p:cNvPr id="2" name="Slide Image Placeholder 1"/>
-          <p:cNvSpPr>
+      </ns0:grpSpPr>
+      <ns0:sp>
+        <ns0:nvSpPr>
+          <ns0:cNvPr id="2" name="Slide Image Placeholder 1"/>
+          <ns0:cNvSpPr>
             <a:spLocks noGrp="1" noRot="1" noChangeAspect="1"/>
-          </p:cNvSpPr>
-          <p:nvPr>
-            <p:ph type="sldImg"/>
-          </p:nvPr>
-        </p:nvSpPr>
-        <p:spPr/>
-      </p:sp>
-      <p:sp>
-        <p:nvSpPr>
-          <p:cNvPr id="3" name="Notes Placeholder 2"/>
-          <p:cNvSpPr>
+          </ns0:cNvSpPr>
+          <ns0:nvPr>
+            <ns0:ph type="sldImg"/>
+          </ns0:nvPr>
+        </ns0:nvSpPr>
+        <ns0:spPr/>
+      </ns0:sp>
+      <ns0:sp>
+        <ns0:nvSpPr>
+          <ns0:cNvPr id="3" name="Notes Placeholder 2"/>
+          <ns0:cNvSpPr>
             <a:spLocks noGrp="1"/>
-          </p:cNvSpPr>
-          <p:nvPr>
-            <p:ph type="body" idx="1"/>
-          </p:nvPr>
-        </p:nvSpPr>
-        <p:spPr/>
-        <p:txBody>
+          </ns0:cNvSpPr>
+          <ns0:nvPr>
+            <ns0:ph type="body" idx="1"/>
+          </ns0:nvPr>
+        </ns0:nvSpPr>
+        <ns0:spPr/>
+        <ns0:txBody>
           <a:bodyPr/>
           <a:lstStyle/>
           <a:p>
             <a:r>
               <a:rPr lang="en-US" dirty="0"/>
-              <a:t>1. Was unterscheidet eine Primzahl von einer zusammengesetzten Zahl?
-Lösung: Primzahlen haben genau zwei positive Teiler: 1 und sich selbst.
-2. Wann endet die Dezimaldarstellung eines vollständig gekürzten Bruchs?
-Lösung: Wenn der Nenner nur die Primfaktoren 2 und/oder 5 enthält.
-3. Warum braucht man bei 1/3 + 1/4 einen gemeinsamen Nenner?
-Lösung: Damit gleich große Teilstücke addiert werden.</a:t>
+              <a:t/>
             </a:r>
             <a:endParaRPr lang="en-US" dirty="0"/>
           </a:p>
-        </p:txBody>
-      </p:sp>
-      <p:sp>
-        <p:nvSpPr>
-          <p:cNvPr id="4" name="Slide Number Placeholder 3"/>
-          <p:cNvSpPr>
+        </ns0:txBody>
+      </ns0:sp>
+      <ns0:sp>
+        <ns0:nvSpPr>
+          <ns0:cNvPr id="4" name="Slide Number Placeholder 3"/>
+          <ns0:cNvSpPr>
             <a:spLocks noGrp="1"/>
-          </p:cNvSpPr>
-          <p:nvPr>
-            <p:ph type="sldNum" sz="quarter" idx="10"/>
-          </p:nvPr>
-        </p:nvSpPr>
-        <p:spPr/>
-        <p:txBody>
+          </ns0:cNvSpPr>
+          <ns0:nvPr>
+            <ns0:ph type="sldNum" sz="quarter" idx="10"/>
+          </ns0:nvPr>
+        </ns0:nvSpPr>
+        <ns0:spPr/>
+        <ns0:txBody>
           <a:bodyPr/>
           <a:lstStyle/>
           <a:p>
             <a:fld id="{F7021451-1387-4CA6-816F-3879F97B5CBC}" type="slidenum">
               <a:rPr lang="en-US"/>
-              <a:t>3</a:t>
+              <a:t/>
             </a:fld>
             <a:endParaRPr lang="en-US"/>
           </a:p>
-        </p:txBody>
-      </p:sp>
-    </p:spTree>
-    <p:extLst>
-      <p:ext uri="{BB962C8B-B14F-4D97-AF65-F5344CB8AC3E}">
-        <p14:creationId xmlns:p14="http://schemas.microsoft.com/office/powerpoint/2010/main" val="1024086991"/>
-      </p:ext>
-    </p:extLst>
-  </p:cSld>
-  <p:clrMapOvr>
+        </ns0:txBody>
+      </ns0:sp>
+    </ns0:spTree>
+    <ns0:extLst>
+      <ns0:ext uri="{BB962C8B-B14F-4D97-AF65-F5344CB8AC3E}">
+        <ns2:creationId val="1024086991"/>
+      </ns0:ext>
+    </ns0:extLst>
+  </ns0:cSld>
+  <ns0:clrMapOvr>
     <a:masterClrMapping/>
-  </p:clrMapOvr>
-</p:notes>
+  </ns0:clrMapOvr>
+</ns0:notes>
 </file>
 
 <file path=ppt/notesSlides/notesSlide4.xml><?xml version="1.0" encoding="utf-8"?>
-<p:notes xmlns:a="http://schemas.openxmlformats.org/drawingml/2006/main" xmlns:r="http://schemas.openxmlformats.org/officeDocument/2006/relationships" xmlns:p="http://schemas.openxmlformats.org/presentationml/2006/main">
-  <p:cSld>
-    <p:spTree>
-      <p:nvGrpSpPr>
-        <p:cNvPr id="1" name=""/>
-        <p:cNvGrpSpPr/>
-        <p:nvPr/>
-      </p:nvGrpSpPr>
-      <p:grpSpPr>
+<ns0:notes xmlns:a="http://schemas.openxmlformats.org/drawingml/2006/main" xmlns:ns0="http://schemas.openxmlformats.org/presentationml/2006/main" xmlns:ns2="http://schemas.microsoft.com/office/powerpoint/2010/main">
+  <ns0:cSld>
+    <ns0:spTree>
+      <ns0:nvGrpSpPr>
+        <ns0:cNvPr id="1" name=""/>
+        <ns0:cNvGrpSpPr/>
+        <ns0:nvPr/>
+      </ns0:nvGrpSpPr>
+      <ns0:grpSpPr>
         <a:xfrm>
           <a:off x="0" y="0"/>
           <a:ext cx="0" cy="0"/>
           <a:chOff x="0" y="0"/>
           <a:chExt cx="0" cy="0"/>
         </a:xfrm>
-      </p:grpSpPr>
-      <p:sp>
-        <p:nvSpPr>
-          <p:cNvPr id="2" name="Slide Image Placeholder 1"/>
-          <p:cNvSpPr>
+      </ns0:grpSpPr>
+      <ns0:sp>
+        <ns0:nvSpPr>
+          <ns0:cNvPr id="2" name="Slide Image Placeholder 1"/>
+          <ns0:cNvSpPr>
             <a:spLocks noGrp="1" noRot="1" noChangeAspect="1"/>
-          </p:cNvSpPr>
-          <p:nvPr>
-            <p:ph type="sldImg"/>
-          </p:nvPr>
-        </p:nvSpPr>
-        <p:spPr/>
-      </p:sp>
-      <p:sp>
-        <p:nvSpPr>
-          <p:cNvPr id="3" name="Notes Placeholder 2"/>
-          <p:cNvSpPr>
+          </ns0:cNvSpPr>
+          <ns0:nvPr>
+            <ns0:ph type="sldImg"/>
+          </ns0:nvPr>
+        </ns0:nvSpPr>
+        <ns0:spPr/>
+      </ns0:sp>
+      <ns0:sp>
+        <ns0:nvSpPr>
+          <ns0:cNvPr id="3" name="Notes Placeholder 2"/>
+          <ns0:cNvSpPr>
             <a:spLocks noGrp="1"/>
-          </p:cNvSpPr>
-          <p:nvPr>
-            <p:ph type="body" idx="1"/>
-          </p:nvPr>
-        </p:nvSpPr>
-        <p:spPr/>
-        <p:txBody>
+          </ns0:cNvSpPr>
+          <ns0:nvPr>
+            <ns0:ph type="body" idx="1"/>
+          </ns0:nvPr>
+        </ns0:nvSpPr>
+        <ns0:spPr/>
+        <ns0:txBody>
           <a:bodyPr/>
           <a:lstStyle/>
           <a:p>
             <a:r>
               <a:rPr lang="en-US" dirty="0"/>
-              <a:t>1. Zerlege 84 in Primfaktoren.
-Lösung: 84 = 2² · 3 · 7.
-2. Ordne: 2/3, 0,6, 65 %.
-Lösung: 0,6 &lt; 65 % &lt; 2/3.
-3. Berechne: 3/5 · 10.
-Lösung: 6.</a:t>
+              <a:t/>
             </a:r>
             <a:endParaRPr lang="en-US" dirty="0"/>
           </a:p>
-        </p:txBody>
-      </p:sp>
-      <p:sp>
-        <p:nvSpPr>
-          <p:cNvPr id="4" name="Slide Number Placeholder 3"/>
-          <p:cNvSpPr>
+        </ns0:txBody>
+      </ns0:sp>
+      <ns0:sp>
+        <ns0:nvSpPr>
+          <ns0:cNvPr id="4" name="Slide Number Placeholder 3"/>
+          <ns0:cNvSpPr>
             <a:spLocks noGrp="1"/>
-          </p:cNvSpPr>
-          <p:nvPr>
-            <p:ph type="sldNum" sz="quarter" idx="10"/>
-          </p:nvPr>
-        </p:nvSpPr>
-        <p:spPr/>
-        <p:txBody>
+          </ns0:cNvSpPr>
+          <ns0:nvPr>
+            <ns0:ph type="sldNum" sz="quarter" idx="10"/>
+          </ns0:nvPr>
+        </ns0:nvSpPr>
+        <ns0:spPr/>
+        <ns0:txBody>
           <a:bodyPr/>
           <a:lstStyle/>
           <a:p>
             <a:fld id="{F7021451-1387-4CA6-816F-3879F97B5CBC}" type="slidenum">
               <a:rPr lang="en-US"/>
-              <a:t>4</a:t>
+              <a:t/>
             </a:fld>
             <a:endParaRPr lang="en-US"/>
           </a:p>
-        </p:txBody>
-      </p:sp>
-    </p:spTree>
-    <p:extLst>
-      <p:ext uri="{BB962C8B-B14F-4D97-AF65-F5344CB8AC3E}">
-        <p14:creationId xmlns:p14="http://schemas.microsoft.com/office/powerpoint/2010/main" val="1024086991"/>
-      </p:ext>
-    </p:extLst>
-  </p:cSld>
-  <p:clrMapOvr>
+        </ns0:txBody>
+      </ns0:sp>
+    </ns0:spTree>
+    <ns0:extLst>
+      <ns0:ext uri="{BB962C8B-B14F-4D97-AF65-F5344CB8AC3E}">
+        <ns2:creationId val="1024086991"/>
+      </ns0:ext>
+    </ns0:extLst>
+  </ns0:cSld>
+  <ns0:clrMapOvr>
     <a:masterClrMapping/>
-  </p:clrMapOvr>
-</p:notes>
+  </ns0:clrMapOvr>
+</ns0:notes>
 </file>
 
 <file path=ppt/notesSlides/notesSlide5.xml><?xml version="1.0" encoding="utf-8"?>
-<p:notes xmlns:a="http://schemas.openxmlformats.org/drawingml/2006/main" xmlns:r="http://schemas.openxmlformats.org/officeDocument/2006/relationships" xmlns:p="http://schemas.openxmlformats.org/presentationml/2006/main">
-  <p:cSld>
-    <p:spTree>
-      <p:nvGrpSpPr>
-        <p:cNvPr id="1" name=""/>
-        <p:cNvGrpSpPr/>
-        <p:nvPr/>
-      </p:nvGrpSpPr>
-      <p:grpSpPr>
+<ns0:notes xmlns:a="http://schemas.openxmlformats.org/drawingml/2006/main" xmlns:ns0="http://schemas.openxmlformats.org/presentationml/2006/main" xmlns:ns2="http://schemas.microsoft.com/office/powerpoint/2010/main">
+  <ns0:cSld>
+    <ns0:spTree>
+      <ns0:nvGrpSpPr>
+        <ns0:cNvPr id="1" name=""/>
+        <ns0:cNvGrpSpPr/>
+        <ns0:nvPr/>
+      </ns0:nvGrpSpPr>
+      <ns0:grpSpPr>
         <a:xfrm>
           <a:off x="0" y="0"/>
           <a:ext cx="0" cy="0"/>
           <a:chOff x="0" y="0"/>
           <a:chExt cx="0" cy="0"/>
         </a:xfrm>
-      </p:grpSpPr>
-      <p:sp>
-        <p:nvSpPr>
-          <p:cNvPr id="2" name="Slide Image Placeholder 1"/>
-          <p:cNvSpPr>
+      </ns0:grpSpPr>
+      <ns0:sp>
+        <ns0:nvSpPr>
+          <ns0:cNvPr id="2" name="Slide Image Placeholder 1"/>
+          <ns0:cNvSpPr>
             <a:spLocks noGrp="1" noRot="1" noChangeAspect="1"/>
-          </p:cNvSpPr>
-          <p:nvPr>
-            <p:ph type="sldImg"/>
-          </p:nvPr>
-        </p:nvSpPr>
-        <p:spPr/>
-      </p:sp>
-      <p:sp>
-        <p:nvSpPr>
-          <p:cNvPr id="3" name="Notes Placeholder 2"/>
-          <p:cNvSpPr>
+          </ns0:cNvSpPr>
+          <ns0:nvPr>
+            <ns0:ph type="sldImg"/>
+          </ns0:nvPr>
+        </ns0:nvSpPr>
+        <ns0:spPr/>
+      </ns0:sp>
+      <ns0:sp>
+        <ns0:nvSpPr>
+          <ns0:cNvPr id="3" name="Notes Placeholder 2"/>
+          <ns0:cNvSpPr>
             <a:spLocks noGrp="1"/>
-          </p:cNvSpPr>
-          <p:nvPr>
-            <p:ph type="body" idx="1"/>
-          </p:nvPr>
-        </p:nvSpPr>
-        <p:spPr/>
-        <p:txBody>
+          </ns0:cNvSpPr>
+          <ns0:nvPr>
+            <ns0:ph type="body" idx="1"/>
+          </ns0:nvPr>
+        </ns0:nvSpPr>
+        <ns0:spPr/>
+        <ns0:txBody>
           <a:bodyPr/>
           <a:lstStyle/>
           <a:p>
             <a:r>
               <a:rPr lang="en-US" dirty="0"/>
-              <a:t>1. Wann endet die Dezimaldarstellung eines vollständig gekürzten Bruchs?
-Lösung: Wenn der Nenner nur die Primfaktoren 2 und/oder 5 enthält.
-2. Berechne: 3/5 · 10.
-Lösung: 6.</a:t>
+              <a:t/>
             </a:r>
             <a:endParaRPr lang="en-US" dirty="0"/>
           </a:p>
-        </p:txBody>
-      </p:sp>
-      <p:sp>
-        <p:nvSpPr>
-          <p:cNvPr id="4" name="Slide Number Placeholder 3"/>
-          <p:cNvSpPr>
+        </ns0:txBody>
+      </ns0:sp>
+      <ns0:sp>
+        <ns0:nvSpPr>
+          <ns0:cNvPr id="4" name="Slide Number Placeholder 3"/>
+          <ns0:cNvSpPr>
             <a:spLocks noGrp="1"/>
-          </p:cNvSpPr>
-          <p:nvPr>
-            <p:ph type="sldNum" sz="quarter" idx="10"/>
-          </p:nvPr>
-        </p:nvSpPr>
-        <p:spPr/>
-        <p:txBody>
+          </ns0:cNvSpPr>
+          <ns0:nvPr>
+            <ns0:ph type="sldNum" sz="quarter" idx="10"/>
+          </ns0:nvPr>
+        </ns0:nvSpPr>
+        <ns0:spPr/>
+        <ns0:txBody>
           <a:bodyPr/>
           <a:lstStyle/>
           <a:p>
             <a:fld id="{F7021451-1387-4CA6-816F-3879F97B5CBC}" type="slidenum">
               <a:rPr lang="en-US"/>
-              <a:t>5</a:t>
+              <a:t/>
             </a:fld>
             <a:endParaRPr lang="en-US"/>
           </a:p>
-        </p:txBody>
-      </p:sp>
-    </p:spTree>
-    <p:extLst>
-      <p:ext uri="{BB962C8B-B14F-4D97-AF65-F5344CB8AC3E}">
-        <p14:creationId xmlns:p14="http://schemas.microsoft.com/office/powerpoint/2010/main" val="1024086991"/>
-      </p:ext>
-    </p:extLst>
-  </p:cSld>
-  <p:clrMapOvr>
+        </ns0:txBody>
+      </ns0:sp>
+    </ns0:spTree>
+    <ns0:extLst>
+      <ns0:ext uri="{BB962C8B-B14F-4D97-AF65-F5344CB8AC3E}">
+        <ns2:creationId val="1024086991"/>
+      </ns0:ext>
+    </ns0:extLst>
+  </ns0:cSld>
+  <ns0:clrMapOvr>
     <a:masterClrMapping/>
-  </p:clrMapOvr>
-</p:notes>
+  </ns0:clrMapOvr>
+</ns0:notes>
 </file>
 
 <file path=ppt/notesSlides/notesSlide6.xml><?xml version="1.0" encoding="utf-8"?>
-<p:notes xmlns:a="http://schemas.openxmlformats.org/drawingml/2006/main" xmlns:r="http://schemas.openxmlformats.org/officeDocument/2006/relationships" xmlns:p="http://schemas.openxmlformats.org/presentationml/2006/main">
-  <p:cSld>
-    <p:spTree>
-      <p:nvGrpSpPr>
-        <p:cNvPr id="1" name=""/>
-        <p:cNvGrpSpPr/>
-        <p:nvPr/>
-      </p:nvGrpSpPr>
-      <p:grpSpPr>
+<ns0:notes xmlns:a="http://schemas.openxmlformats.org/drawingml/2006/main" xmlns:ns0="http://schemas.openxmlformats.org/presentationml/2006/main" xmlns:ns2="http://schemas.microsoft.com/office/powerpoint/2010/main">
+  <ns0:cSld>
+    <ns0:spTree>
+      <ns0:nvGrpSpPr>
+        <ns0:cNvPr id="1" name=""/>
+        <ns0:cNvGrpSpPr/>
+        <ns0:nvPr/>
+      </ns0:nvGrpSpPr>
+      <ns0:grpSpPr>
         <a:xfrm>
           <a:off x="0" y="0"/>
           <a:ext cx="0" cy="0"/>
           <a:chOff x="0" y="0"/>
           <a:chExt cx="0" cy="0"/>
         </a:xfrm>
-      </p:grpSpPr>
-      <p:sp>
-        <p:nvSpPr>
-          <p:cNvPr id="2" name="Slide Image Placeholder 1"/>
-          <p:cNvSpPr>
+      </ns0:grpSpPr>
+      <ns0:sp>
+        <ns0:nvSpPr>
+          <ns0:cNvPr id="2" name="Slide Image Placeholder 1"/>
+          <ns0:cNvSpPr>
             <a:spLocks noGrp="1" noRot="1" noChangeAspect="1"/>
-          </p:cNvSpPr>
-          <p:nvPr>
-            <p:ph type="sldImg"/>
-          </p:nvPr>
-        </p:nvSpPr>
-        <p:spPr/>
-      </p:sp>
-      <p:sp>
-        <p:nvSpPr>
-          <p:cNvPr id="3" name="Notes Placeholder 2"/>
-          <p:cNvSpPr>
+          </ns0:cNvSpPr>
+          <ns0:nvPr>
+            <ns0:ph type="sldImg"/>
+          </ns0:nvPr>
+        </ns0:nvSpPr>
+        <ns0:spPr/>
+      </ns0:sp>
+      <ns0:sp>
+        <ns0:nvSpPr>
+          <ns0:cNvPr id="3" name="Notes Placeholder 2"/>
+          <ns0:cNvSpPr>
             <a:spLocks noGrp="1"/>
-          </p:cNvSpPr>
-          <p:nvPr>
-            <p:ph type="body" idx="1"/>
-          </p:nvPr>
-        </p:nvSpPr>
-        <p:spPr/>
-        <p:txBody>
+          </ns0:cNvSpPr>
+          <ns0:nvPr>
+            <ns0:ph type="body" idx="1"/>
+          </ns0:nvPr>
+        </ns0:nvSpPr>
+        <ns0:spPr/>
+        <ns0:txBody>
           <a:bodyPr/>
           <a:lstStyle/>
           <a:p>
             <a:r>
               <a:rPr lang="en-US" dirty="0"/>
-              <a:t>1. Berechne: 3/5 · 10.
-Lösung: 6.
-2. Morgens −3 °C, mittags +5 °C. Um wie viel steigt die Temperatur?
-Lösung: Um 8 °C.</a:t>
+              <a:t/>
             </a:r>
             <a:endParaRPr lang="en-US" dirty="0"/>
           </a:p>
-        </p:txBody>
-      </p:sp>
-      <p:sp>
-        <p:nvSpPr>
-          <p:cNvPr id="4" name="Slide Number Placeholder 3"/>
-          <p:cNvSpPr>
+        </ns0:txBody>
+      </ns0:sp>
+      <ns0:sp>
+        <ns0:nvSpPr>
+          <ns0:cNvPr id="4" name="Slide Number Placeholder 3"/>
+          <ns0:cNvSpPr>
             <a:spLocks noGrp="1"/>
-          </p:cNvSpPr>
-          <p:nvPr>
-            <p:ph type="sldNum" sz="quarter" idx="10"/>
-          </p:nvPr>
-        </p:nvSpPr>
-        <p:spPr/>
-        <p:txBody>
+          </ns0:cNvSpPr>
+          <ns0:nvPr>
+            <ns0:ph type="sldNum" sz="quarter" idx="10"/>
+          </ns0:nvPr>
+        </ns0:nvSpPr>
+        <ns0:spPr/>
+        <ns0:txBody>
           <a:bodyPr/>
           <a:lstStyle/>
           <a:p>
             <a:fld id="{F7021451-1387-4CA6-816F-3879F97B5CBC}" type="slidenum">
               <a:rPr lang="en-US"/>
-              <a:t>6</a:t>
+              <a:t/>
             </a:fld>
             <a:endParaRPr lang="en-US"/>
           </a:p>
-        </p:txBody>
-      </p:sp>
-    </p:spTree>
-    <p:extLst>
-      <p:ext uri="{BB962C8B-B14F-4D97-AF65-F5344CB8AC3E}">
-        <p14:creationId xmlns:p14="http://schemas.microsoft.com/office/powerpoint/2010/main" val="1024086991"/>
-      </p:ext>
-    </p:extLst>
-  </p:cSld>
-  <p:clrMapOvr>
+        </ns0:txBody>
+      </ns0:sp>
+    </ns0:spTree>
+    <ns0:extLst>
+      <ns0:ext uri="{BB962C8B-B14F-4D97-AF65-F5344CB8AC3E}">
+        <ns2:creationId val="1024086991"/>
+      </ns0:ext>
+    </ns0:extLst>
+  </ns0:cSld>
+  <ns0:clrMapOvr>
     <a:masterClrMapping/>
-  </p:clrMapOvr>
-</p:notes>
+  </ns0:clrMapOvr>
+</ns0:notes>
 </file>
 
 <file path=ppt/notesSlides/notesSlide7.xml><?xml version="1.0" encoding="utf-8"?>
-<p:notes xmlns:a="http://schemas.openxmlformats.org/drawingml/2006/main" xmlns:r="http://schemas.openxmlformats.org/officeDocument/2006/relationships" xmlns:p="http://schemas.openxmlformats.org/presentationml/2006/main">
-  <p:cSld>
-    <p:spTree>
-      <p:nvGrpSpPr>
-        <p:cNvPr id="1" name=""/>
-        <p:cNvGrpSpPr/>
-        <p:nvPr/>
-      </p:nvGrpSpPr>
-      <p:grpSpPr>
+<ns0:notes xmlns:a="http://schemas.openxmlformats.org/drawingml/2006/main" xmlns:ns0="http://schemas.openxmlformats.org/presentationml/2006/main" xmlns:ns2="http://schemas.microsoft.com/office/powerpoint/2010/main">
+  <ns0:cSld>
+    <ns0:spTree>
+      <ns0:nvGrpSpPr>
+        <ns0:cNvPr id="1" name=""/>
+        <ns0:cNvGrpSpPr/>
+        <ns0:nvPr/>
+      </ns0:nvGrpSpPr>
+      <ns0:grpSpPr>
         <a:xfrm>
           <a:off x="0" y="0"/>
           <a:ext cx="0" cy="0"/>
           <a:chOff x="0" y="0"/>
           <a:chExt cx="0" cy="0"/>
         </a:xfrm>
-      </p:grpSpPr>
-      <p:sp>
-        <p:nvSpPr>
-          <p:cNvPr id="2" name="Slide Image Placeholder 1"/>
-          <p:cNvSpPr>
+      </ns0:grpSpPr>
+      <ns0:sp>
+        <ns0:nvSpPr>
+          <ns0:cNvPr id="2" name="Slide Image Placeholder 1"/>
+          <ns0:cNvSpPr>
             <a:spLocks noGrp="1" noRot="1" noChangeAspect="1"/>
-          </p:cNvSpPr>
-          <p:nvPr>
-            <p:ph type="sldImg"/>
-          </p:nvPr>
-        </p:nvSpPr>
-        <p:spPr/>
-      </p:sp>
-      <p:sp>
-        <p:nvSpPr>
-          <p:cNvPr id="3" name="Notes Placeholder 2"/>
-          <p:cNvSpPr>
+          </ns0:cNvSpPr>
+          <ns0:nvPr>
+            <ns0:ph type="sldImg"/>
+          </ns0:nvPr>
+        </ns0:nvSpPr>
+        <ns0:spPr/>
+      </ns0:sp>
+      <ns0:sp>
+        <ns0:nvSpPr>
+          <ns0:cNvPr id="3" name="Notes Placeholder 2"/>
+          <ns0:cNvSpPr>
             <a:spLocks noGrp="1"/>
-          </p:cNvSpPr>
-          <p:nvPr>
-            <p:ph type="body" idx="1"/>
-          </p:nvPr>
-        </p:nvSpPr>
-        <p:spPr/>
-        <p:txBody>
+          </ns0:cNvSpPr>
+          <ns0:nvPr>
+            <ns0:ph type="body" idx="1"/>
+          </ns0:nvPr>
+        </ns0:nvSpPr>
+        <ns0:spPr/>
+        <ns0:txBody>
           <a:bodyPr/>
           <a:lstStyle/>
           <a:p>
             <a:r>
               <a:rPr lang="en-US" dirty="0"/>
-              <a:t>1. Finde die kleinste Zahl &gt; 100, die durch 6 und 8 teilbar ist.
-Lösung: 120.
-2. Welche Zahl hat Abstand 7 von 0?
-Lösung: 7 und −7.
-3. „Beim Addieren von Brüchen addiert man Zähler und Nenner.“ – Korrigiere.
-Lösung: Nur gleichnamige Brüche werden über die Zähler addiert; der gemeinsame Nenner bleibt erhalten.</a:t>
+              <a:t/>
             </a:r>
             <a:endParaRPr lang="en-US" dirty="0"/>
           </a:p>
-        </p:txBody>
-      </p:sp>
-      <p:sp>
-        <p:nvSpPr>
-          <p:cNvPr id="4" name="Slide Number Placeholder 3"/>
-          <p:cNvSpPr>
+        </ns0:txBody>
+      </ns0:sp>
+      <ns0:sp>
+        <ns0:nvSpPr>
+          <ns0:cNvPr id="4" name="Slide Number Placeholder 3"/>
+          <ns0:cNvSpPr>
             <a:spLocks noGrp="1"/>
-          </p:cNvSpPr>
-          <p:nvPr>
-            <p:ph type="sldNum" sz="quarter" idx="10"/>
-          </p:nvPr>
-        </p:nvSpPr>
-        <p:spPr/>
-        <p:txBody>
+          </ns0:cNvSpPr>
+          <ns0:nvPr>
+            <ns0:ph type="sldNum" sz="quarter" idx="10"/>
+          </ns0:nvPr>
+        </ns0:nvSpPr>
+        <ns0:spPr/>
+        <ns0:txBody>
           <a:bodyPr/>
           <a:lstStyle/>
           <a:p>
             <a:fld id="{F7021451-1387-4CA6-816F-3879F97B5CBC}" type="slidenum">
               <a:rPr lang="en-US"/>
-              <a:t>7</a:t>
+              <a:t/>
             </a:fld>
             <a:endParaRPr lang="en-US"/>
           </a:p>
-        </p:txBody>
-      </p:sp>
-    </p:spTree>
-    <p:extLst>
-      <p:ext uri="{BB962C8B-B14F-4D97-AF65-F5344CB8AC3E}">
-        <p14:creationId xmlns:p14="http://schemas.microsoft.com/office/powerpoint/2010/main" val="1024086991"/>
-      </p:ext>
-    </p:extLst>
-  </p:cSld>
-  <p:clrMapOvr>
+        </ns0:txBody>
+      </ns0:sp>
+    </ns0:spTree>
+    <ns0:extLst>
+      <ns0:ext uri="{BB962C8B-B14F-4D97-AF65-F5344CB8AC3E}">
+        <ns2:creationId val="1024086991"/>
+      </ns0:ext>
+    </ns0:extLst>
+  </ns0:cSld>
+  <ns0:clrMapOvr>
     <a:masterClrMapping/>
-  </p:clrMapOvr>
-</p:notes>
+  </ns0:clrMapOvr>
+</ns0:notes>
 </file>
 
 <file path=ppt/notesSlides/notesSlide8.xml><?xml version="1.0" encoding="utf-8"?>
-<p:notes xmlns:a="http://schemas.openxmlformats.org/drawingml/2006/main" xmlns:r="http://schemas.openxmlformats.org/officeDocument/2006/relationships" xmlns:p="http://schemas.openxmlformats.org/presentationml/2006/main">
-  <p:cSld>
-    <p:spTree>
-      <p:nvGrpSpPr>
-        <p:cNvPr id="1" name=""/>
-        <p:cNvGrpSpPr/>
-        <p:nvPr/>
-      </p:nvGrpSpPr>
-      <p:grpSpPr>
+<ns0:notes xmlns:a="http://schemas.openxmlformats.org/drawingml/2006/main" xmlns:ns0="http://schemas.openxmlformats.org/presentationml/2006/main" xmlns:ns2="http://schemas.microsoft.com/office/powerpoint/2010/main">
+  <ns0:cSld>
+    <ns0:spTree>
+      <ns0:nvGrpSpPr>
+        <ns0:cNvPr id="1" name=""/>
+        <ns0:cNvGrpSpPr/>
+        <ns0:nvPr/>
+      </ns0:nvGrpSpPr>
+      <ns0:grpSpPr>
         <a:xfrm>
           <a:off x="0" y="0"/>
           <a:ext cx="0" cy="0"/>
           <a:chOff x="0" y="0"/>
           <a:chExt cx="0" cy="0"/>
         </a:xfrm>
-      </p:grpSpPr>
-      <p:sp>
-        <p:nvSpPr>
-          <p:cNvPr id="2" name="Slide Image Placeholder 1"/>
-          <p:cNvSpPr>
+      </ns0:grpSpPr>
+      <ns0:sp>
+        <ns0:nvSpPr>
+          <ns0:cNvPr id="2" name="Slide Image Placeholder 1"/>
+          <ns0:cNvSpPr>
             <a:spLocks noGrp="1" noRot="1" noChangeAspect="1"/>
-          </p:cNvSpPr>
-          <p:nvPr>
-            <p:ph type="sldImg"/>
-          </p:nvPr>
-        </p:nvSpPr>
-        <p:spPr/>
-      </p:sp>
-      <p:sp>
-        <p:nvSpPr>
-          <p:cNvPr id="3" name="Notes Placeholder 2"/>
-          <p:cNvSpPr>
+          </ns0:cNvSpPr>
+          <ns0:nvPr>
+            <ns0:ph type="sldImg"/>
+          </ns0:nvPr>
+        </ns0:nvSpPr>
+        <ns0:spPr/>
+      </ns0:sp>
+      <ns0:sp>
+        <ns0:nvSpPr>
+          <ns0:cNvPr id="3" name="Notes Placeholder 2"/>
+          <ns0:cNvSpPr>
             <a:spLocks noGrp="1"/>
-          </p:cNvSpPr>
-          <p:nvPr>
-            <p:ph type="body" idx="1"/>
-          </p:nvPr>
-        </p:nvSpPr>
-        <p:spPr/>
-        <p:txBody>
+          </ns0:cNvSpPr>
+          <ns0:nvPr>
+            <ns0:ph type="body" idx="1"/>
+          </ns0:nvPr>
+        </ns0:nvSpPr>
+        <ns0:spPr/>
+        <ns0:txBody>
           <a:bodyPr/>
           <a:lstStyle/>
           <a:p>
             <a:r>
               <a:rPr lang="en-US" dirty="0"/>
-              <a:t>1. Ist 126 durch 3 teilbar? Begründe kurz.
-Lösung: Ja, Quersumme 1+2+6=9 ist durch 3 teilbar.
-2. Schreibe 0,75 als Bruch und Prozentzahl.
-Lösung: 3/4 und 75 %.
-3. Berechne: 1/4 + 2/4.
-Lösung: 3/4.
-4. Ordne: −4, 2, −1, 0.
-Lösung: −4 &lt; −1 &lt; 0 &lt; 2.
-5. Was unterscheidet eine Primzahl von einer zusammengesetzten Zahl?
-Lösung: Primzahlen haben genau zwei positive Teiler: 1 und sich selbst.</a:t>
+              <a:t/>
             </a:r>
             <a:endParaRPr lang="en-US" dirty="0"/>
           </a:p>
-        </p:txBody>
-      </p:sp>
-      <p:sp>
-        <p:nvSpPr>
-          <p:cNvPr id="4" name="Slide Number Placeholder 3"/>
-          <p:cNvSpPr>
+        </ns0:txBody>
+      </ns0:sp>
+      <ns0:sp>
+        <ns0:nvSpPr>
+          <ns0:cNvPr id="4" name="Slide Number Placeholder 3"/>
+          <ns0:cNvSpPr>
             <a:spLocks noGrp="1"/>
-          </p:cNvSpPr>
-          <p:nvPr>
-            <p:ph type="sldNum" sz="quarter" idx="10"/>
-          </p:nvPr>
-        </p:nvSpPr>
-        <p:spPr/>
-        <p:txBody>
+          </ns0:cNvSpPr>
+          <ns0:nvPr>
+            <ns0:ph type="sldNum" sz="quarter" idx="10"/>
+          </ns0:nvPr>
+        </ns0:nvSpPr>
+        <ns0:spPr/>
+        <ns0:txBody>
           <a:bodyPr/>
           <a:lstStyle/>
           <a:p>
             <a:fld id="{F7021451-1387-4CA6-816F-3879F97B5CBC}" type="slidenum">
               <a:rPr lang="en-US"/>
-              <a:t>8</a:t>
+              <a:t/>
             </a:fld>
             <a:endParaRPr lang="en-US"/>
           </a:p>
-        </p:txBody>
-      </p:sp>
-    </p:spTree>
-    <p:extLst>
-      <p:ext uri="{BB962C8B-B14F-4D97-AF65-F5344CB8AC3E}">
-        <p14:creationId xmlns:p14="http://schemas.microsoft.com/office/powerpoint/2010/main" val="1024086991"/>
-      </p:ext>
-    </p:extLst>
-  </p:cSld>
-  <p:clrMapOvr>
+        </ns0:txBody>
+      </ns0:sp>
+    </ns0:spTree>
+    <ns0:extLst>
+      <ns0:ext uri="{BB962C8B-B14F-4D97-AF65-F5344CB8AC3E}">
+        <ns2:creationId val="1024086991"/>
+      </ns0:ext>
+    </ns0:extLst>
+  </ns0:cSld>
+  <ns0:clrMapOvr>
     <a:masterClrMapping/>
-  </p:clrMapOvr>
-</p:notes>
+  </ns0:clrMapOvr>
+</ns0:notes>
 </file>
 
 <file path=ppt/slideLayouts/slideLayout1.xml><?xml version="1.0" encoding="utf-8"?>
@@ -2699,29 +2660,29 @@
 </file>
 
 <file path=ppt/slides/slide2.xml><?xml version="1.0" encoding="utf-8"?>
-<p:sld xmlns:a="http://schemas.openxmlformats.org/drawingml/2006/main" xmlns:r="http://schemas.openxmlformats.org/officeDocument/2006/relationships" xmlns:p="http://schemas.openxmlformats.org/presentationml/2006/main">
-  <p:cSld name="Slide 2">
-    <p:spTree>
-      <p:nvGrpSpPr>
-        <p:cNvPr id="1" name=""/>
-        <p:cNvGrpSpPr/>
-        <p:nvPr/>
-      </p:nvGrpSpPr>
-      <p:grpSpPr>
+<ns0:sld xmlns:a="http://schemas.openxmlformats.org/drawingml/2006/main" xmlns:ns0="http://schemas.openxmlformats.org/presentationml/2006/main" xmlns:ns2="http://schemas.microsoft.com/office/mac/drawingml/2011/main">
+  <ns0:cSld name="Slide 2">
+    <ns0:spTree>
+      <ns0:nvGrpSpPr>
+        <ns0:cNvPr id="1" name=""/>
+        <ns0:cNvGrpSpPr/>
+        <ns0:nvPr/>
+      </ns0:nvGrpSpPr>
+      <ns0:grpSpPr>
         <a:xfrm>
           <a:off x="0" y="0"/>
           <a:ext cx="0" cy="0"/>
           <a:chOff x="0" y="0"/>
           <a:chExt cx="0" cy="0"/>
         </a:xfrm>
-      </p:grpSpPr>
-      <p:sp>
-        <p:nvSpPr>
-          <p:cNvPr id="2" name="Text 0"/>
-          <p:cNvSpPr/>
-          <p:nvPr/>
-        </p:nvSpPr>
-        <p:spPr>
+      </ns0:grpSpPr>
+      <ns0:sp>
+        <ns0:nvSpPr>
+          <ns0:cNvPr id="2" name="Text 0"/>
+          <ns0:cNvSpPr/>
+          <ns0:nvPr/>
+        </ns0:nvSpPr>
+        <ns0:spPr>
           <a:xfrm>
             <a:off x="658368" y="658368"/>
             <a:ext cx="9784080" cy="475488"/>
@@ -2731,8 +2692,8 @@
           </a:prstGeom>
           <a:noFill/>
           <a:ln/>
-        </p:spPr>
-        <p:txBody>
+        </ns0:spPr>
+        <ns0:txBody>
           <a:bodyPr wrap="square" lIns="508" tIns="508" rIns="508" bIns="508" rtlCol="0" anchor="ctr">
             <a:normAutofit/>
           </a:bodyPr>
@@ -2754,15 +2715,15 @@
             </a:r>
             <a:endParaRPr lang="en-US" sz="2600" dirty="0"/>
           </a:p>
-        </p:txBody>
-      </p:sp>
-      <p:sp>
-        <p:nvSpPr>
-          <p:cNvPr id="3" name="Shape 1"/>
-          <p:cNvSpPr/>
-          <p:nvPr/>
-        </p:nvSpPr>
-        <p:spPr>
+        </ns0:txBody>
+      </ns0:sp>
+      <ns0:sp>
+        <ns0:nvSpPr>
+          <ns0:cNvPr id="3" name="Shape 1"/>
+          <ns0:cNvSpPr/>
+          <ns0:nvPr/>
+        </ns0:nvSpPr>
+        <ns0:spPr>
           <a:xfrm>
             <a:off x="10744200" y="694944"/>
             <a:ext cx="685800" cy="109728"/>
@@ -2779,15 +2740,15 @@
             </a:solidFill>
             <a:prstDash val="solid"/>
           </a:ln>
-        </p:spPr>
-      </p:sp>
-      <p:sp>
-        <p:nvSpPr>
-          <p:cNvPr id="4" name="Text 2"/>
-          <p:cNvSpPr/>
-          <p:nvPr/>
-        </p:nvSpPr>
-        <p:spPr>
+        </ns0:spPr>
+      </ns0:sp>
+      <ns0:sp>
+        <ns0:nvSpPr>
+          <ns0:cNvPr id="4" name="Text 2"/>
+          <ns0:cNvSpPr/>
+          <ns0:nvPr/>
+        </ns0:nvSpPr>
+        <ns0:spPr>
           <a:xfrm>
             <a:off x="676656" y="1152144"/>
             <a:ext cx="7772400" cy="256032"/>
@@ -2797,8 +2758,8 @@
           </a:prstGeom>
           <a:noFill/>
           <a:ln/>
-        </p:spPr>
-        <p:txBody>
+        </ns0:spPr>
+        <ns0:txBody>
           <a:bodyPr wrap="square" lIns="508" tIns="508" rIns="508" bIns="508" rtlCol="0" anchor="ctr">
             <a:normAutofit/>
           </a:bodyPr>
@@ -2820,15 +2781,15 @@
             </a:r>
             <a:endParaRPr lang="en-US" sz="1150" dirty="0"/>
           </a:p>
-        </p:txBody>
-      </p:sp>
-      <p:sp>
-        <p:nvSpPr>
-          <p:cNvPr id="5" name="Shape 3"/>
-          <p:cNvSpPr/>
-          <p:nvPr/>
-        </p:nvSpPr>
-        <p:spPr>
+        </ns0:txBody>
+      </ns0:sp>
+      <ns0:sp>
+        <ns0:nvSpPr>
+          <ns0:cNvPr id="5" name="Shape 3"/>
+          <ns0:cNvSpPr/>
+          <ns0:nvPr/>
+        </ns0:nvSpPr>
+        <ns0:spPr>
           <a:xfrm>
             <a:off x="731520" y="1600200"/>
             <a:ext cx="5257800" cy="1600200"/>
@@ -2854,15 +2815,15 @@
               </a:srgbClr>
             </a:outerShdw>
           </a:effectLst>
-        </p:spPr>
-      </p:sp>
-      <p:sp>
-        <p:nvSpPr>
-          <p:cNvPr id="6" name="Shape 4"/>
-          <p:cNvSpPr/>
-          <p:nvPr/>
-        </p:nvSpPr>
-        <p:spPr>
+        </ns0:spPr>
+      </ns0:sp>
+      <ns0:sp>
+        <ns0:nvSpPr>
+          <ns0:cNvPr id="6" name="Shape 4"/>
+          <ns0:cNvSpPr/>
+          <ns0:nvPr/>
+        </ns0:nvSpPr>
+        <ns0:spPr>
           <a:xfrm>
             <a:off x="896112" y="1764792"/>
             <a:ext cx="438912" cy="438912"/>
@@ -2879,15 +2840,15 @@
             </a:solidFill>
             <a:prstDash val="solid"/>
           </a:ln>
-        </p:spPr>
-      </p:sp>
-      <p:sp>
-        <p:nvSpPr>
-          <p:cNvPr id="7" name="Text 5"/>
-          <p:cNvSpPr/>
-          <p:nvPr/>
-        </p:nvSpPr>
-        <p:spPr>
+        </ns0:spPr>
+      </ns0:sp>
+      <ns0:sp>
+        <ns0:nvSpPr>
+          <ns0:cNvPr id="7" name="Text 5"/>
+          <ns0:cNvSpPr/>
+          <ns0:nvPr/>
+        </ns0:nvSpPr>
+        <ns0:spPr>
           <a:xfrm>
             <a:off x="896112" y="1764792"/>
             <a:ext cx="438912" cy="438912"/>
@@ -2897,8 +2858,8 @@
           </a:prstGeom>
           <a:noFill/>
           <a:ln/>
-        </p:spPr>
-        <p:txBody>
+        </ns0:spPr>
+        <ns0:txBody>
           <a:bodyPr wrap="square" lIns="508" tIns="508" rIns="508" bIns="508" rtlCol="0" anchor="ctr">
             <a:normAutofit/>
           </a:bodyPr>
@@ -2920,15 +2881,15 @@
             </a:r>
             <a:endParaRPr lang="en-US" sz="1300" dirty="0"/>
           </a:p>
-        </p:txBody>
-      </p:sp>
-      <p:sp>
-        <p:nvSpPr>
-          <p:cNvPr id="8" name="Text 6"/>
-          <p:cNvSpPr/>
-          <p:nvPr/>
-        </p:nvSpPr>
-        <p:spPr>
+        </ns0:txBody>
+      </ns0:sp>
+      <ns0:sp>
+        <ns0:nvSpPr>
+          <ns0:cNvPr id="8" name="Text 6"/>
+          <ns0:cNvSpPr/>
+          <ns0:nvPr/>
+        </ns0:nvSpPr>
+        <ns0:spPr>
           <a:xfrm>
             <a:off x="1463040" y="1755648"/>
             <a:ext cx="4361688" cy="1344168"/>
@@ -2938,8 +2899,8 @@
           </a:prstGeom>
           <a:noFill/>
           <a:ln/>
-        </p:spPr>
-        <p:txBody>
+        </ns0:spPr>
+        <ns0:txBody>
           <a:bodyPr wrap="square" lIns="508" tIns="508" rIns="508" bIns="508" rtlCol="0" anchor="ctr">
             <a:normAutofit/>
           </a:bodyPr>
@@ -2961,15 +2922,15 @@
             </a:r>
             <a:endParaRPr lang="en-US" sz="1650" dirty="0"/>
           </a:p>
-        </p:txBody>
-      </p:sp>
-      <p:sp>
-        <p:nvSpPr>
-          <p:cNvPr id="9" name="Shape 7"/>
-          <p:cNvSpPr/>
-          <p:nvPr/>
-        </p:nvSpPr>
-        <p:spPr>
+        </ns0:txBody>
+      </ns0:sp>
+      <ns0:sp>
+        <ns0:nvSpPr>
+          <ns0:cNvPr id="9" name="Shape 7"/>
+          <ns0:cNvSpPr/>
+          <ns0:nvPr/>
+        </ns0:nvSpPr>
+        <ns0:spPr>
           <a:xfrm>
             <a:off x="6199632" y="1600200"/>
             <a:ext cx="5257800" cy="1600200"/>
@@ -2995,15 +2956,15 @@
               </a:srgbClr>
             </a:outerShdw>
           </a:effectLst>
-        </p:spPr>
-      </p:sp>
-      <p:sp>
-        <p:nvSpPr>
-          <p:cNvPr id="10" name="Shape 8"/>
-          <p:cNvSpPr/>
-          <p:nvPr/>
-        </p:nvSpPr>
-        <p:spPr>
+        </ns0:spPr>
+      </ns0:sp>
+      <ns0:sp>
+        <ns0:nvSpPr>
+          <ns0:cNvPr id="10" name="Shape 8"/>
+          <ns0:cNvSpPr/>
+          <ns0:nvPr/>
+        </ns0:nvSpPr>
+        <ns0:spPr>
           <a:xfrm>
             <a:off x="6364224" y="1764792"/>
             <a:ext cx="438912" cy="438912"/>
@@ -3020,15 +2981,15 @@
             </a:solidFill>
             <a:prstDash val="solid"/>
           </a:ln>
-        </p:spPr>
-      </p:sp>
-      <p:sp>
-        <p:nvSpPr>
-          <p:cNvPr id="11" name="Text 9"/>
-          <p:cNvSpPr/>
-          <p:nvPr/>
-        </p:nvSpPr>
-        <p:spPr>
+        </ns0:spPr>
+      </ns0:sp>
+      <ns0:sp>
+        <ns0:nvSpPr>
+          <ns0:cNvPr id="11" name="Text 9"/>
+          <ns0:cNvSpPr/>
+          <ns0:nvPr/>
+        </ns0:nvSpPr>
+        <ns0:spPr>
           <a:xfrm>
             <a:off x="6364224" y="1764792"/>
             <a:ext cx="438912" cy="438912"/>
@@ -3038,8 +2999,8 @@
           </a:prstGeom>
           <a:noFill/>
           <a:ln/>
-        </p:spPr>
-        <p:txBody>
+        </ns0:spPr>
+        <ns0:txBody>
           <a:bodyPr wrap="square" lIns="508" tIns="508" rIns="508" bIns="508" rtlCol="0" anchor="ctr">
             <a:normAutofit/>
           </a:bodyPr>
@@ -3061,15 +3022,15 @@
             </a:r>
             <a:endParaRPr lang="en-US" sz="1300" dirty="0"/>
           </a:p>
-        </p:txBody>
-      </p:sp>
-      <p:sp>
-        <p:nvSpPr>
-          <p:cNvPr id="12" name="Text 10"/>
-          <p:cNvSpPr/>
-          <p:nvPr/>
-        </p:nvSpPr>
-        <p:spPr>
+        </ns0:txBody>
+      </ns0:sp>
+      <ns0:sp>
+        <ns0:nvSpPr>
+          <ns0:cNvPr id="12" name="Text 10"/>
+          <ns0:cNvSpPr/>
+          <ns0:nvPr/>
+        </ns0:nvSpPr>
+        <ns0:spPr>
           <a:xfrm>
             <a:off x="6931152" y="1755648"/>
             <a:ext cx="4361688" cy="1344168"/>
@@ -3079,8 +3040,8 @@
           </a:prstGeom>
           <a:noFill/>
           <a:ln/>
-        </p:spPr>
-        <p:txBody>
+        </ns0:spPr>
+        <ns0:txBody>
           <a:bodyPr wrap="square" lIns="508" tIns="508" rIns="508" bIns="508" rtlCol="0" anchor="ctr">
             <a:normAutofit/>
           </a:bodyPr>
@@ -3102,15 +3063,15 @@
             </a:r>
             <a:endParaRPr lang="en-US" sz="1650" dirty="0"/>
           </a:p>
-        </p:txBody>
-      </p:sp>
-      <p:sp>
-        <p:nvSpPr>
-          <p:cNvPr id="13" name="Shape 11"/>
-          <p:cNvSpPr/>
-          <p:nvPr/>
-        </p:nvSpPr>
-        <p:spPr>
+        </ns0:txBody>
+      </ns0:sp>
+      <ns0:sp>
+        <ns0:nvSpPr>
+          <ns0:cNvPr id="13" name="Shape 11"/>
+          <ns0:cNvSpPr/>
+          <ns0:nvPr/>
+        </ns0:nvSpPr>
+        <ns0:spPr>
           <a:xfrm>
             <a:off x="731520" y="3456432"/>
             <a:ext cx="5257800" cy="1600200"/>
@@ -3136,15 +3097,15 @@
               </a:srgbClr>
             </a:outerShdw>
           </a:effectLst>
-        </p:spPr>
-      </p:sp>
-      <p:sp>
-        <p:nvSpPr>
-          <p:cNvPr id="14" name="Shape 12"/>
-          <p:cNvSpPr/>
-          <p:nvPr/>
-        </p:nvSpPr>
-        <p:spPr>
+        </ns0:spPr>
+      </ns0:sp>
+      <ns0:sp>
+        <ns0:nvSpPr>
+          <ns0:cNvPr id="14" name="Shape 12"/>
+          <ns0:cNvSpPr/>
+          <ns0:nvPr/>
+        </ns0:nvSpPr>
+        <ns0:spPr>
           <a:xfrm>
             <a:off x="896112" y="3621024"/>
             <a:ext cx="438912" cy="438912"/>
@@ -3161,15 +3122,15 @@
             </a:solidFill>
             <a:prstDash val="solid"/>
           </a:ln>
-        </p:spPr>
-      </p:sp>
-      <p:sp>
-        <p:nvSpPr>
-          <p:cNvPr id="15" name="Text 13"/>
-          <p:cNvSpPr/>
-          <p:nvPr/>
-        </p:nvSpPr>
-        <p:spPr>
+        </ns0:spPr>
+      </ns0:sp>
+      <ns0:sp>
+        <ns0:nvSpPr>
+          <ns0:cNvPr id="15" name="Text 13"/>
+          <ns0:cNvSpPr/>
+          <ns0:nvPr/>
+        </ns0:nvSpPr>
+        <ns0:spPr>
           <a:xfrm>
             <a:off x="896112" y="3621024"/>
             <a:ext cx="438912" cy="438912"/>
@@ -3179,8 +3140,8 @@
           </a:prstGeom>
           <a:noFill/>
           <a:ln/>
-        </p:spPr>
-        <p:txBody>
+        </ns0:spPr>
+        <ns0:txBody>
           <a:bodyPr wrap="square" lIns="508" tIns="508" rIns="508" bIns="508" rtlCol="0" anchor="ctr">
             <a:normAutofit/>
           </a:bodyPr>
@@ -3202,15 +3163,15 @@
             </a:r>
             <a:endParaRPr lang="en-US" sz="1300" dirty="0"/>
           </a:p>
-        </p:txBody>
-      </p:sp>
-      <p:sp>
-        <p:nvSpPr>
-          <p:cNvPr id="16" name="Text 14"/>
-          <p:cNvSpPr/>
-          <p:nvPr/>
-        </p:nvSpPr>
-        <p:spPr>
+        </ns0:txBody>
+      </ns0:sp>
+      <ns0:sp>
+        <ns0:nvSpPr>
+          <ns0:cNvPr id="16" name="Text 14"/>
+          <ns0:cNvSpPr/>
+          <ns0:nvPr/>
+        </ns0:nvSpPr>
+        <ns0:spPr>
           <a:xfrm>
             <a:off x="1463040" y="3611880"/>
             <a:ext cx="4361688" cy="1344168"/>
@@ -3220,8 +3181,8 @@
           </a:prstGeom>
           <a:noFill/>
           <a:ln/>
-        </p:spPr>
-        <p:txBody>
+        </ns0:spPr>
+        <ns0:txBody>
           <a:bodyPr wrap="square" lIns="508" tIns="508" rIns="508" bIns="508" rtlCol="0" anchor="ctr">
             <a:normAutofit/>
           </a:bodyPr>
@@ -3243,15 +3204,15 @@
             </a:r>
             <a:endParaRPr lang="en-US" sz="1650" dirty="0"/>
           </a:p>
-        </p:txBody>
-      </p:sp>
-      <p:sp>
-        <p:nvSpPr>
-          <p:cNvPr id="17" name="Shape 15"/>
-          <p:cNvSpPr/>
-          <p:nvPr/>
-        </p:nvSpPr>
-        <p:spPr>
+        </ns0:txBody>
+      </ns0:sp>
+      <ns0:sp>
+        <ns0:nvSpPr>
+          <ns0:cNvPr id="17" name="Shape 15"/>
+          <ns0:cNvSpPr/>
+          <ns0:nvPr/>
+        </ns0:nvSpPr>
+        <ns0:spPr>
           <a:xfrm>
             <a:off x="6199632" y="3456432"/>
             <a:ext cx="5257800" cy="1600200"/>
@@ -3277,15 +3238,15 @@
               </a:srgbClr>
             </a:outerShdw>
           </a:effectLst>
-        </p:spPr>
-      </p:sp>
-      <p:sp>
-        <p:nvSpPr>
-          <p:cNvPr id="18" name="Shape 16"/>
-          <p:cNvSpPr/>
-          <p:nvPr/>
-        </p:nvSpPr>
-        <p:spPr>
+        </ns0:spPr>
+      </ns0:sp>
+      <ns0:sp>
+        <ns0:nvSpPr>
+          <ns0:cNvPr id="18" name="Shape 16"/>
+          <ns0:cNvSpPr/>
+          <ns0:nvPr/>
+        </ns0:nvSpPr>
+        <ns0:spPr>
           <a:xfrm>
             <a:off x="6364224" y="3621024"/>
             <a:ext cx="438912" cy="438912"/>
@@ -3302,15 +3263,15 @@
             </a:solidFill>
             <a:prstDash val="solid"/>
           </a:ln>
-        </p:spPr>
-      </p:sp>
-      <p:sp>
-        <p:nvSpPr>
-          <p:cNvPr id="19" name="Text 17"/>
-          <p:cNvSpPr/>
-          <p:nvPr/>
-        </p:nvSpPr>
-        <p:spPr>
+        </ns0:spPr>
+      </ns0:sp>
+      <ns0:sp>
+        <ns0:nvSpPr>
+          <ns0:cNvPr id="19" name="Text 17"/>
+          <ns0:cNvSpPr/>
+          <ns0:nvPr/>
+        </ns0:nvSpPr>
+        <ns0:spPr>
           <a:xfrm>
             <a:off x="6364224" y="3621024"/>
             <a:ext cx="438912" cy="438912"/>
@@ -3320,8 +3281,8 @@
           </a:prstGeom>
           <a:noFill/>
           <a:ln/>
-        </p:spPr>
-        <p:txBody>
+        </ns0:spPr>
+        <ns0:txBody>
           <a:bodyPr wrap="square" lIns="508" tIns="508" rIns="508" bIns="508" rtlCol="0" anchor="ctr">
             <a:normAutofit/>
           </a:bodyPr>
@@ -3343,15 +3304,15 @@
             </a:r>
             <a:endParaRPr lang="en-US" sz="1300" dirty="0"/>
           </a:p>
-        </p:txBody>
-      </p:sp>
-      <p:sp>
-        <p:nvSpPr>
-          <p:cNvPr id="20" name="Text 18"/>
-          <p:cNvSpPr/>
-          <p:nvPr/>
-        </p:nvSpPr>
-        <p:spPr>
+        </ns0:txBody>
+      </ns0:sp>
+      <ns0:sp>
+        <ns0:nvSpPr>
+          <ns0:cNvPr id="20" name="Text 18"/>
+          <ns0:cNvSpPr/>
+          <ns0:nvPr/>
+        </ns0:nvSpPr>
+        <ns0:spPr>
           <a:xfrm>
             <a:off x="6931152" y="3611880"/>
             <a:ext cx="4361688" cy="1344168"/>
@@ -3361,8 +3322,8 @@
           </a:prstGeom>
           <a:noFill/>
           <a:ln/>
-        </p:spPr>
-        <p:txBody>
+        </ns0:spPr>
+        <ns0:txBody>
           <a:bodyPr wrap="square" lIns="508" tIns="508" rIns="508" bIns="508" rtlCol="0" anchor="ctr">
             <a:normAutofit/>
           </a:bodyPr>
@@ -3384,15 +3345,15 @@
             </a:r>
             <a:endParaRPr lang="en-US" sz="1650" dirty="0"/>
           </a:p>
-        </p:txBody>
-      </p:sp>
-      <p:sp>
-        <p:nvSpPr>
-          <p:cNvPr id="21" name="Text 19"/>
-          <p:cNvSpPr/>
-          <p:nvPr/>
-        </p:nvSpPr>
-        <p:spPr>
+        </ns0:txBody>
+      </ns0:sp>
+      <ns0:sp>
+        <ns0:nvSpPr>
+          <ns0:cNvPr id="21" name="Text 19"/>
+          <ns0:cNvSpPr/>
+          <ns0:nvPr/>
+        </ns0:nvSpPr>
+        <ns0:spPr>
           <a:xfrm>
             <a:off x="749808" y="5532120"/>
             <a:ext cx="4754880" cy="274320"/>
@@ -3402,8 +3363,8 @@
           </a:prstGeom>
           <a:noFill/>
           <a:ln/>
-        </p:spPr>
-        <p:txBody>
+        </ns0:spPr>
+        <ns0:txBody>
           <a:bodyPr wrap="square" lIns="508" tIns="508" rIns="508" bIns="508" rtlCol="0" anchor="ctr">
             <a:normAutofit/>
           </a:bodyPr>
@@ -3421,23 +3382,23 @@
                 <a:ea typeface="Arial" pitchFamily="34" charset="-122"/>
                 <a:cs typeface="Arial" pitchFamily="34" charset="-120"/>
               </a:rPr>
-              <a:t>Ziel: erst Sicherheit gewinnen – dann steigern.</a:t>
+              <a:t/>
             </a:r>
             <a:endParaRPr lang="en-US" sz="1150" dirty="0"/>
           </a:p>
-        </p:txBody>
-      </p:sp>
-      <p:sp>
-        <p:nvSpPr>
-          <p:cNvPr id="25" name="Slide Number Placeholder 0"/>
-          <p:cNvSpPr>
+        </ns0:txBody>
+      </ns0:sp>
+      <ns0:sp>
+        <ns0:nvSpPr>
+          <ns0:cNvPr id="25" name="Slide Number Placeholder 0"/>
+          <ns0:cNvSpPr>
             <a:spLocks noGrp="1"/>
-          </p:cNvSpPr>
-          <p:nvPr>
-            <p:ph type="sldNum" sz="quarter" idx="4294967295"/>
-          </p:nvPr>
-        </p:nvSpPr>
-        <p:spPr>
+          </ns0:cNvSpPr>
+          <ns0:nvPr>
+            <ns0:ph type="sldNum" sz="quarter" idx="4294967295"/>
+          </ns0:nvPr>
+        </ns0:nvSpPr>
+        <ns0:spPr>
           <a:xfrm>
             <a:off x="11384280" y="6492240"/>
             <a:ext cx="320040" cy="164592"/>
@@ -3447,11 +3408,11 @@
           </a:prstGeom>
           <a:extLst>
             <a:ext uri="{C572A759-6A51-4108-AA02-DFA0A04FC94B}">
-              <ma14:wrappingTextBoxFlag xmlns:ma14="http://schemas.microsoft.com/office/mac/drawingml/2011/main" val="0"/>
+              <ns2:wrappingTextBoxFlag val="0"/>
             </a:ext>
           </a:extLst>
-        </p:spPr>
-        <p:txBody>
+        </ns0:spPr>
+        <ns0:txBody>
           <a:bodyPr/>
           <a:lstStyle>
             <a:lvl1pPr>
@@ -3473,14 +3434,14 @@
             </a:fld>
             <a:endParaRPr lang="en-US"/>
           </a:p>
-        </p:txBody>
-      </p:sp>
-    </p:spTree>
-  </p:cSld>
-  <p:clrMapOvr>
+        </ns0:txBody>
+      </ns0:sp>
+    </ns0:spTree>
+  </ns0:cSld>
+  <ns0:clrMapOvr>
     <a:masterClrMapping/>
-  </p:clrMapOvr>
-</p:sld>
+  </ns0:clrMapOvr>
+</ns0:sld>
 </file>
 
 <file path=ppt/slides/slide3.xml><?xml version="1.0" encoding="utf-8"?>
